--- a/Consumer-Lending-Overview/Data_Governance_Policies_Executive_Overview.pptx
+++ b/Consumer-Lending-Overview/Data_Governance_Policies_Executive_Overview.pptx
@@ -12042,7 +12042,7 @@
                 </a:solidFill>
                 <a:latin typeface="Calibri"/>
               </a:rPr>
-              <a:t>A finished umbrella policy for Aldergrove Bank (fictitious). Wording and requirements are illustrative.</a:t>
+              <a:t>A finished umbrella policy for Fictitia Bank (fictitious). Wording and requirements are illustrative.</a:t>
             </a:r>
           </a:p>
         </p:txBody>
@@ -12492,7 +12492,7 @@
                 </a:solidFill>
                 <a:latin typeface="Calibri"/>
               </a:rPr>
-              <a:t>This policy sets out how Aldergrove Bank governs data, so that data used for financial, regulatory, risk and management reporting is accurate, complete, timely and controlled.</a:t>
+              <a:t>This policy sets out how Fictitia Bank governs data, so that data used for financial, regulatory, risk and management reporting is accurate, complete, timely and controlled.</a:t>
             </a:r>
           </a:p>
           <a:p>
